--- a/docs/lectures/lecture_05/05_lecture_powerpoint.pptx
+++ b/docs/lectures/lecture_05/05_lecture_powerpoint.pptx
@@ -3300,7 +3300,7 @@
             </a:pPr>
             <a:r>
               <a:rPr/>
-              <a:t>Lecture 05: Regression Analysis</a:t>
+              <a:t>Lecture 05 — Linear Regression</a:t>
             </a:r>
           </a:p>
         </p:txBody>
@@ -3330,7 +3330,38 @@
             </a:pPr>
             <a:r>
               <a:rPr/>
+              <a:t>Predicting leaf area from paper tracing mass (Whitlock &amp; Schluter Ch. 17)</a:t>
+            </a:r>
+            <a:br/>
+            <a:br/>
+            <a:r>
+              <a:rPr/>
               <a:t>Bill Perry</a:t>
+            </a:r>
+          </a:p>
+        </p:txBody>
+      </p:sp>
+      <p:sp>
+        <p:nvSpPr>
+          <p:cNvPr id="4" name="Date Placeholder 3"/>
+          <p:cNvSpPr>
+            <a:spLocks noGrp="1"/>
+          </p:cNvSpPr>
+          <p:nvPr>
+            <p:ph idx="10" sz="half" type="dt"/>
+          </p:nvPr>
+        </p:nvSpPr>
+        <p:spPr/>
+        <p:txBody>
+          <a:bodyPr/>
+          <a:lstStyle/>
+          <a:p>
+            <a:pPr lvl="0" indent="0" marL="0">
+              <a:buNone/>
+            </a:pPr>
+            <a:r>
+              <a:rPr/>
+              <a:t>2026-06-28</a:t>
             </a:r>
           </a:p>
         </p:txBody>
@@ -3412,7 +3443,7 @@
                 </a:solidFill>
                 <a:latin typeface="Courier"/>
               </a:rPr>
-              <a:t># Load packages — always at the top of the script ----------</a:t>
+              <a:t># Load packages at the top of the script ---------------</a:t>
             </a:r>
             <a:br/>
             <a:r>
@@ -3510,7 +3541,7 @@
                 </a:solidFill>
                 <a:latin typeface="Courier"/>
               </a:rPr>
-              <a:t># Load the paper calibration data -------------------------</a:t>
+              <a:t># Load the paper calibration data ----------------------</a:t>
             </a:r>
             <a:br/>
             <a:r>
@@ -3674,7 +3705,7 @@
                 </a:solidFill>
                 <a:latin typeface="Courier"/>
               </a:rPr>
-              <a:t># Quick overview of the calibration data ------------------</a:t>
+              <a:t># Quick overview of the calibration data ---------------</a:t>
             </a:r>
             <a:br/>
             <a:r>
@@ -4595,7 +4626,7 @@
                 </a:solidFill>
                 <a:latin typeface="Courier"/>
               </a:rPr>
-              <a:t># How many squares per area group? -----------------------</a:t>
+              <a:t># How many squares per area group? --------------------</a:t>
             </a:r>
             <a:br/>
             <a:r>
@@ -4698,7 +4729,7 @@
                 </a:solidFill>
                 <a:latin typeface="Courier"/>
               </a:rPr>
-              <a:t>n        =</a:t>
+              <a:t>n       =</a:t>
             </a:r>
             <a:r>
               <a:rPr>
@@ -4744,7 +4775,7 @@
                 </a:solidFill>
                 <a:latin typeface="Courier"/>
               </a:rPr>
-              <a:t>mean_wt  =</a:t>
+              <a:t>mean_wt =</a:t>
             </a:r>
             <a:r>
               <a:rPr>
@@ -4922,7 +4953,7 @@
                 </a:solidFill>
                 <a:latin typeface="Courier"/>
               </a:rPr>
-              <a:t># Scatter plot of area vs mass to check linearity --------</a:t>
+              <a:t># Scatter plot of area vs mass to check linearity -----</a:t>
             </a:r>
             <a:br/>
             <a:r>
@@ -4932,7 +4963,7 @@
                 </a:solidFill>
                 <a:latin typeface="Courier"/>
               </a:rPr>
-              <a:t>scatter_09_plot &lt;- paper_df </a:t>
+              <a:t>scatter_05_plot &lt;- paper_df </a:t>
             </a:r>
             <a:r>
               <a:rPr>
@@ -5356,14 +5387,14 @@
                 </a:solidFill>
                 <a:latin typeface="Courier"/>
               </a:rPr>
-              <a:t>scatter_09_plot</a:t>
+              <a:t>scatter_05_plot</a:t>
             </a:r>
           </a:p>
         </p:txBody>
       </p:sp>
       <p:pic>
         <p:nvPicPr>
-          <p:cNvPr descr="05_lecture_powerpoint_files/figure-pptx/scatter-raw-1.png" id="0" name="Picture 1"/>
+          <p:cNvPr descr="05_lecture_powerpoint_files/figure-pptx/scatter-raw-05-1.png" id="0" name="Picture 1"/>
           <p:cNvPicPr>
             <a:picLocks noGrp="1" noChangeAspect="1"/>
           </p:cNvPicPr>
@@ -5565,7 +5596,7 @@
                 </a:solidFill>
                 <a:latin typeface="Courier"/>
               </a:rPr>
-              <a:t># Fit the least-squares regression line ------------------</a:t>
+              <a:t># Fit the least-squares regression line ---------------</a:t>
             </a:r>
             <a:br/>
             <a:r>
@@ -5653,7 +5684,7 @@
                 </a:solidFill>
                 <a:latin typeface="Courier"/>
               </a:rPr>
-              <a:t># Full model summary — every number matters --------------</a:t>
+              <a:t># Full model summary — every number matters -----------</a:t>
             </a:r>
             <a:br/>
             <a:r>
@@ -5937,7 +5968,7 @@
                 </a:solidFill>
                 <a:latin typeface="Courier"/>
               </a:rPr>
-              <a:t># Extract the key numbers from the model -----------------</a:t>
+              <a:t># Extract the key numbers from the model --------------</a:t>
             </a:r>
             <a:br/>
             <a:r>
@@ -6701,7 +6732,7 @@
                 </a:solidFill>
                 <a:latin typeface="Courier"/>
               </a:rPr>
-              <a:t># Extract R-squared and build the equation label ---------</a:t>
+              <a:t># Extract R-squared and build the equation label ------</a:t>
             </a:r>
             <a:br/>
             <a:r>
@@ -7382,15 +7413,6 @@
             <a:r>
               <a:rPr/>
               <a:t>📖 W&amp;S §17.4 p. 555</a:t>
-            </a:r>
-          </a:p>
-          <a:p>
-            <a:pPr lvl="0" indent="0" marL="1270000">
-              <a:buNone/>
-            </a:pPr>
-            <a:r>
-              <a:rPr sz="2000" i="1"/>
-              <a:t>“R² is a measure of the fit of the line to data.”</a:t>
             </a:r>
           </a:p>
         </p:txBody>
@@ -7472,7 +7494,7 @@
                 </a:solidFill>
                 <a:latin typeface="Courier"/>
               </a:rPr>
-              <a:t># Calibration curve with regression line and 95% CI band -</a:t>
+              <a:t># Calibration curve with regression line + 95% CI band</a:t>
             </a:r>
             <a:br/>
             <a:r>
@@ -8332,7 +8354,7 @@
       </p:sp>
       <p:pic>
         <p:nvPicPr>
-          <p:cNvPr descr="05_lecture_powerpoint_files/figure-pptx/calibration-line-plot-1.png" id="0" name="Picture 1"/>
+          <p:cNvPr descr="05_lecture_powerpoint_files/figure-pptx/calibration-line-plot-05-1.png" id="0" name="Picture 1"/>
           <p:cNvPicPr>
             <a:picLocks noGrp="1" noChangeAspect="1"/>
           </p:cNvPicPr>
@@ -8527,7 +8549,27 @@
                 </a:solidFill>
                 <a:latin typeface="Courier"/>
               </a:rPr>
-              <a:t># Add fitted values and residuals to the data frame ------</a:t>
+              <a:t># mutate() adds new columns to the data frame ----------</a:t>
+            </a:r>
+            <a:br/>
+            <a:r>
+              <a:rPr>
+                <a:solidFill>
+                  <a:srgbClr val="5E5E5E"/>
+                </a:solidFill>
+                <a:latin typeface="Courier"/>
+              </a:rPr>
+              <a:t># Here we add the model's fitted values and residuals</a:t>
+            </a:r>
+            <a:br/>
+            <a:r>
+              <a:rPr>
+                <a:solidFill>
+                  <a:srgbClr val="5E5E5E"/>
+                </a:solidFill>
+                <a:latin typeface="Courier"/>
+              </a:rPr>
+              <a:t># so we can plot them — recall mutate() from Lecture 03!</a:t>
             </a:r>
             <a:br/>
             <a:r>
@@ -9173,7 +9215,7 @@
       </p:sp>
       <p:pic>
         <p:nvPicPr>
-          <p:cNvPr descr="05_lecture_powerpoint_files/figure-pptx/resid-vs-fitted-1.png" id="0" name="Picture 1"/>
+          <p:cNvPr descr="05_lecture_powerpoint_files/figure-pptx/resid-vs-fitted-05-1.png" id="0" name="Picture 1"/>
           <p:cNvPicPr>
             <a:picLocks noGrp="1" noChangeAspect="1"/>
           </p:cNvPicPr>
@@ -9364,7 +9406,7 @@
                 </a:solidFill>
                 <a:latin typeface="Courier"/>
               </a:rPr>
-              <a:t># QQ plot of residuals — checks normality assumption -----</a:t>
+              <a:t># QQ plot of residuals — checks normality assumption --</a:t>
             </a:r>
             <a:br/>
             <a:r>
@@ -9824,7 +9866,7 @@
       </p:sp>
       <p:pic>
         <p:nvPicPr>
-          <p:cNvPr descr="05_lecture_powerpoint_files/figure-pptx/qq-resid-09-1.png" id="0" name="Picture 1"/>
+          <p:cNvPr descr="05_lecture_powerpoint_files/figure-pptx/qq-resid-05-1.png" id="0" name="Picture 1"/>
           <p:cNvPicPr>
             <a:picLocks noGrp="1" noChangeAspect="1"/>
           </p:cNvPicPr>
@@ -9877,7 +9919,7 @@
                 </a:solidFill>
                 <a:latin typeface="Courier"/>
               </a:rPr>
-              <a:t># Shapiro-Wilk test on residuals — formal normality test -</a:t>
+              <a:t># Shapiro-Wilk test on residuals — NOT on raw data ---</a:t>
             </a:r>
             <a:br/>
             <a:r>
@@ -10072,7 +10114,7 @@
                 </a:solidFill>
                 <a:latin typeface="Courier"/>
               </a:rPr>
-              <a:t># Plug tracing masses directly into the calibration line -</a:t>
+              <a:t># Plug tracing masses into the calibration line -------</a:t>
             </a:r>
             <a:br/>
             <a:r>
@@ -11159,7 +11201,7 @@
                 </a:solidFill>
                 <a:latin typeface="Courier"/>
               </a:rPr>
-              <a:t># predict() gives uncertainty around each prediction -----</a:t>
+              <a:t># predict() gives uncertainty around predictions ------</a:t>
             </a:r>
             <a:br/>
             <a:r>
@@ -11947,7 +11989,7 @@
                 </a:solidFill>
                 <a:latin typeface="Courier"/>
               </a:rPr>
-              <a:t># Pull reporting values from the model -------------------</a:t>
+              <a:t># Pull reporting values from the model ----------------</a:t>
             </a:r>
             <a:br/>
             <a:r>
@@ -12799,6 +12841,140 @@
                 </a:solidFill>
                 <a:latin typeface="Courier"/>
               </a:rPr>
+              <a:t>,</a:t>
+            </a:r>
+            <a:br/>
+            <a:r>
+              <a:rPr>
+                <a:solidFill>
+                  <a:srgbClr val="003B4F"/>
+                </a:solidFill>
+                <a:latin typeface="Courier"/>
+              </a:rPr>
+              <a:t>    </a:t>
+            </a:r>
+            <a:r>
+              <a:rPr>
+                <a:solidFill>
+                  <a:srgbClr val="4758AB"/>
+                </a:solidFill>
+                <a:latin typeface="Courier"/>
+              </a:rPr>
+              <a:t>round</a:t>
+            </a:r>
+            <a:r>
+              <a:rPr>
+                <a:solidFill>
+                  <a:srgbClr val="003B4F"/>
+                </a:solidFill>
+                <a:latin typeface="Courier"/>
+              </a:rPr>
+              <a:t>(a_intercept, </a:t>
+            </a:r>
+            <a:r>
+              <a:rPr>
+                <a:solidFill>
+                  <a:srgbClr val="AD0000"/>
+                </a:solidFill>
+                <a:latin typeface="Courier"/>
+              </a:rPr>
+              <a:t>3</a:t>
+            </a:r>
+            <a:r>
+              <a:rPr>
+                <a:solidFill>
+                  <a:srgbClr val="003B4F"/>
+                </a:solidFill>
+                <a:latin typeface="Courier"/>
+              </a:rPr>
+              <a:t>), </a:t>
+            </a:r>
+            <a:r>
+              <a:rPr>
+                <a:solidFill>
+                  <a:srgbClr val="20794D"/>
+                </a:solidFill>
+                <a:latin typeface="Courier"/>
+              </a:rPr>
+              <a:t>"cm²</a:t>
+            </a:r>
+            <a:r>
+              <a:rPr>
+                <a:solidFill>
+                  <a:srgbClr val="5E5E5E"/>
+                </a:solidFill>
+                <a:latin typeface="Courier"/>
+              </a:rPr>
+              <a:t>\n</a:t>
+            </a:r>
+            <a:r>
+              <a:rPr>
+                <a:solidFill>
+                  <a:srgbClr val="20794D"/>
+                </a:solidFill>
+                <a:latin typeface="Courier"/>
+              </a:rPr>
+              <a:t>"</a:t>
+            </a:r>
+            <a:r>
+              <a:rPr>
+                <a:solidFill>
+                  <a:srgbClr val="003B4F"/>
+                </a:solidFill>
+                <a:latin typeface="Courier"/>
+              </a:rPr>
+              <a:t>)</a:t>
+            </a:r>
+          </a:p>
+          <a:p>
+            <a:pPr lvl="0" indent="0">
+              <a:buNone/>
+            </a:pPr>
+            <a:r>
+              <a:rPr>
+                <a:latin typeface="Courier"/>
+              </a:rPr>
+              <a:t>  area = 130.52 × mass + 0.279 cm²</a:t>
+            </a:r>
+          </a:p>
+          <a:p>
+            <a:pPr lvl="0" indent="0">
+              <a:buNone/>
+            </a:pPr>
+            <a:r>
+              <a:rPr>
+                <a:solidFill>
+                  <a:srgbClr val="4758AB"/>
+                </a:solidFill>
+                <a:latin typeface="Courier"/>
+              </a:rPr>
+              <a:t>cat</a:t>
+            </a:r>
+            <a:r>
+              <a:rPr>
+                <a:solidFill>
+                  <a:srgbClr val="003B4F"/>
+                </a:solidFill>
+                <a:latin typeface="Courier"/>
+              </a:rPr>
+              <a:t>(</a:t>
+            </a:r>
+            <a:r>
+              <a:rPr>
+                <a:solidFill>
+                  <a:srgbClr val="20794D"/>
+                </a:solidFill>
+                <a:latin typeface="Courier"/>
+              </a:rPr>
+              <a:t>"(slope 95% CI:"</a:t>
+            </a:r>
+            <a:r>
+              <a:rPr>
+                <a:solidFill>
+                  <a:srgbClr val="003B4F"/>
+                </a:solidFill>
+                <a:latin typeface="Courier"/>
+              </a:rPr>
               <a:t>, </a:t>
             </a:r>
             <a:r>
@@ -12817,7 +12993,25 @@
                 </a:solidFill>
                 <a:latin typeface="Courier"/>
               </a:rPr>
-              <a:t>(a_intercept, </a:t>
+              <a:t>(</a:t>
+            </a:r>
+            <a:r>
+              <a:rPr>
+                <a:solidFill>
+                  <a:srgbClr val="4758AB"/>
+                </a:solidFill>
+                <a:latin typeface="Courier"/>
+              </a:rPr>
+              <a:t>confint</a:t>
+            </a:r>
+            <a:r>
+              <a:rPr>
+                <a:solidFill>
+                  <a:srgbClr val="003B4F"/>
+                </a:solidFill>
+                <a:latin typeface="Courier"/>
+              </a:rPr>
+              <a:t>(paper_lm_model)[</a:t>
             </a:r>
             <a:r>
               <a:rPr>
@@ -12826,7 +13020,161 @@
                 </a:solidFill>
                 <a:latin typeface="Courier"/>
               </a:rPr>
-              <a:t>3</a:t>
+              <a:t>2</a:t>
+            </a:r>
+            <a:r>
+              <a:rPr>
+                <a:solidFill>
+                  <a:srgbClr val="003B4F"/>
+                </a:solidFill>
+                <a:latin typeface="Courier"/>
+              </a:rPr>
+              <a:t>,</a:t>
+            </a:r>
+            <a:r>
+              <a:rPr>
+                <a:solidFill>
+                  <a:srgbClr val="AD0000"/>
+                </a:solidFill>
+                <a:latin typeface="Courier"/>
+              </a:rPr>
+              <a:t>1</a:t>
+            </a:r>
+            <a:r>
+              <a:rPr>
+                <a:solidFill>
+                  <a:srgbClr val="003B4F"/>
+                </a:solidFill>
+                <a:latin typeface="Courier"/>
+              </a:rPr>
+              <a:t>], </a:t>
+            </a:r>
+            <a:r>
+              <a:rPr>
+                <a:solidFill>
+                  <a:srgbClr val="AD0000"/>
+                </a:solidFill>
+                <a:latin typeface="Courier"/>
+              </a:rPr>
+              <a:t>2</a:t>
+            </a:r>
+            <a:r>
+              <a:rPr>
+                <a:solidFill>
+                  <a:srgbClr val="003B4F"/>
+                </a:solidFill>
+                <a:latin typeface="Courier"/>
+              </a:rPr>
+              <a:t>),</a:t>
+            </a:r>
+            <a:br/>
+            <a:r>
+              <a:rPr>
+                <a:solidFill>
+                  <a:srgbClr val="003B4F"/>
+                </a:solidFill>
+                <a:latin typeface="Courier"/>
+              </a:rPr>
+              <a:t>    </a:t>
+            </a:r>
+            <a:r>
+              <a:rPr>
+                <a:solidFill>
+                  <a:srgbClr val="20794D"/>
+                </a:solidFill>
+                <a:latin typeface="Courier"/>
+              </a:rPr>
+              <a:t>"to"</a:t>
+            </a:r>
+            <a:r>
+              <a:rPr>
+                <a:solidFill>
+                  <a:srgbClr val="003B4F"/>
+                </a:solidFill>
+                <a:latin typeface="Courier"/>
+              </a:rPr>
+              <a:t>, </a:t>
+            </a:r>
+            <a:r>
+              <a:rPr>
+                <a:solidFill>
+                  <a:srgbClr val="4758AB"/>
+                </a:solidFill>
+                <a:latin typeface="Courier"/>
+              </a:rPr>
+              <a:t>round</a:t>
+            </a:r>
+            <a:r>
+              <a:rPr>
+                <a:solidFill>
+                  <a:srgbClr val="003B4F"/>
+                </a:solidFill>
+                <a:latin typeface="Courier"/>
+              </a:rPr>
+              <a:t>(</a:t>
+            </a:r>
+            <a:r>
+              <a:rPr>
+                <a:solidFill>
+                  <a:srgbClr val="4758AB"/>
+                </a:solidFill>
+                <a:latin typeface="Courier"/>
+              </a:rPr>
+              <a:t>confint</a:t>
+            </a:r>
+            <a:r>
+              <a:rPr>
+                <a:solidFill>
+                  <a:srgbClr val="003B4F"/>
+                </a:solidFill>
+                <a:latin typeface="Courier"/>
+              </a:rPr>
+              <a:t>(paper_lm_model)[</a:t>
+            </a:r>
+            <a:r>
+              <a:rPr>
+                <a:solidFill>
+                  <a:srgbClr val="AD0000"/>
+                </a:solidFill>
+                <a:latin typeface="Courier"/>
+              </a:rPr>
+              <a:t>2</a:t>
+            </a:r>
+            <a:r>
+              <a:rPr>
+                <a:solidFill>
+                  <a:srgbClr val="003B4F"/>
+                </a:solidFill>
+                <a:latin typeface="Courier"/>
+              </a:rPr>
+              <a:t>,</a:t>
+            </a:r>
+            <a:r>
+              <a:rPr>
+                <a:solidFill>
+                  <a:srgbClr val="AD0000"/>
+                </a:solidFill>
+                <a:latin typeface="Courier"/>
+              </a:rPr>
+              <a:t>2</a:t>
+            </a:r>
+            <a:r>
+              <a:rPr>
+                <a:solidFill>
+                  <a:srgbClr val="003B4F"/>
+                </a:solidFill>
+                <a:latin typeface="Courier"/>
+              </a:rPr>
+              <a:t>], </a:t>
+            </a:r>
+            <a:r>
+              <a:rPr>
+                <a:solidFill>
+                  <a:srgbClr val="AD0000"/>
+                </a:solidFill>
+                <a:latin typeface="Courier"/>
+              </a:rPr>
+              <a:t>2</a:t>
             </a:r>
             <a:r>
               <a:rPr>
@@ -12844,7 +13192,7 @@
                 </a:solidFill>
                 <a:latin typeface="Courier"/>
               </a:rPr>
-              <a:t>"cm²</a:t>
+              <a:t>"cm²/g)</a:t>
             </a:r>
             <a:r>
               <a:rPr>
@@ -12882,303 +13230,7 @@
               <a:rPr>
                 <a:latin typeface="Courier"/>
               </a:rPr>
-              <a:t>  area = 130.52 × mass + 0.279 cm²</a:t>
-            </a:r>
-          </a:p>
-          <a:p>
-            <a:pPr lvl="0" indent="0">
-              <a:buNone/>
-            </a:pPr>
-            <a:r>
-              <a:rPr>
-                <a:solidFill>
-                  <a:srgbClr val="4758AB"/>
-                </a:solidFill>
-                <a:latin typeface="Courier"/>
-              </a:rPr>
-              <a:t>cat</a:t>
-            </a:r>
-            <a:r>
-              <a:rPr>
-                <a:solidFill>
-                  <a:srgbClr val="003B4F"/>
-                </a:solidFill>
-                <a:latin typeface="Courier"/>
-              </a:rPr>
-              <a:t>(</a:t>
-            </a:r>
-            <a:r>
-              <a:rPr>
-                <a:solidFill>
-                  <a:srgbClr val="20794D"/>
-                </a:solidFill>
-                <a:latin typeface="Courier"/>
-              </a:rPr>
-              <a:t>"(slope 95% CI: "</a:t>
-            </a:r>
-            <a:r>
-              <a:rPr>
-                <a:solidFill>
-                  <a:srgbClr val="003B4F"/>
-                </a:solidFill>
-                <a:latin typeface="Courier"/>
-              </a:rPr>
-              <a:t>, </a:t>
-            </a:r>
-            <a:r>
-              <a:rPr>
-                <a:solidFill>
-                  <a:srgbClr val="4758AB"/>
-                </a:solidFill>
-                <a:latin typeface="Courier"/>
-              </a:rPr>
-              <a:t>round</a:t>
-            </a:r>
-            <a:r>
-              <a:rPr>
-                <a:solidFill>
-                  <a:srgbClr val="003B4F"/>
-                </a:solidFill>
-                <a:latin typeface="Courier"/>
-              </a:rPr>
-              <a:t>(</a:t>
-            </a:r>
-            <a:r>
-              <a:rPr>
-                <a:solidFill>
-                  <a:srgbClr val="4758AB"/>
-                </a:solidFill>
-                <a:latin typeface="Courier"/>
-              </a:rPr>
-              <a:t>confint</a:t>
-            </a:r>
-            <a:r>
-              <a:rPr>
-                <a:solidFill>
-                  <a:srgbClr val="003B4F"/>
-                </a:solidFill>
-                <a:latin typeface="Courier"/>
-              </a:rPr>
-              <a:t>(paper_lm_model)[</a:t>
-            </a:r>
-            <a:r>
-              <a:rPr>
-                <a:solidFill>
-                  <a:srgbClr val="AD0000"/>
-                </a:solidFill>
-                <a:latin typeface="Courier"/>
-              </a:rPr>
-              <a:t>2</a:t>
-            </a:r>
-            <a:r>
-              <a:rPr>
-                <a:solidFill>
-                  <a:srgbClr val="003B4F"/>
-                </a:solidFill>
-                <a:latin typeface="Courier"/>
-              </a:rPr>
-              <a:t>,</a:t>
-            </a:r>
-            <a:r>
-              <a:rPr>
-                <a:solidFill>
-                  <a:srgbClr val="AD0000"/>
-                </a:solidFill>
-                <a:latin typeface="Courier"/>
-              </a:rPr>
-              <a:t>1</a:t>
-            </a:r>
-            <a:r>
-              <a:rPr>
-                <a:solidFill>
-                  <a:srgbClr val="003B4F"/>
-                </a:solidFill>
-                <a:latin typeface="Courier"/>
-              </a:rPr>
-              <a:t>], </a:t>
-            </a:r>
-            <a:r>
-              <a:rPr>
-                <a:solidFill>
-                  <a:srgbClr val="AD0000"/>
-                </a:solidFill>
-                <a:latin typeface="Courier"/>
-              </a:rPr>
-              <a:t>2</a:t>
-            </a:r>
-            <a:r>
-              <a:rPr>
-                <a:solidFill>
-                  <a:srgbClr val="003B4F"/>
-                </a:solidFill>
-                <a:latin typeface="Courier"/>
-              </a:rPr>
-              <a:t>),</a:t>
-            </a:r>
-            <a:br/>
-            <a:r>
-              <a:rPr>
-                <a:solidFill>
-                  <a:srgbClr val="003B4F"/>
-                </a:solidFill>
-                <a:latin typeface="Courier"/>
-              </a:rPr>
-              <a:t>    </a:t>
-            </a:r>
-            <a:r>
-              <a:rPr>
-                <a:solidFill>
-                  <a:srgbClr val="20794D"/>
-                </a:solidFill>
-                <a:latin typeface="Courier"/>
-              </a:rPr>
-              <a:t>"to"</a:t>
-            </a:r>
-            <a:r>
-              <a:rPr>
-                <a:solidFill>
-                  <a:srgbClr val="003B4F"/>
-                </a:solidFill>
-                <a:latin typeface="Courier"/>
-              </a:rPr>
-              <a:t>, </a:t>
-            </a:r>
-            <a:r>
-              <a:rPr>
-                <a:solidFill>
-                  <a:srgbClr val="4758AB"/>
-                </a:solidFill>
-                <a:latin typeface="Courier"/>
-              </a:rPr>
-              <a:t>round</a:t>
-            </a:r>
-            <a:r>
-              <a:rPr>
-                <a:solidFill>
-                  <a:srgbClr val="003B4F"/>
-                </a:solidFill>
-                <a:latin typeface="Courier"/>
-              </a:rPr>
-              <a:t>(</a:t>
-            </a:r>
-            <a:r>
-              <a:rPr>
-                <a:solidFill>
-                  <a:srgbClr val="4758AB"/>
-                </a:solidFill>
-                <a:latin typeface="Courier"/>
-              </a:rPr>
-              <a:t>confint</a:t>
-            </a:r>
-            <a:r>
-              <a:rPr>
-                <a:solidFill>
-                  <a:srgbClr val="003B4F"/>
-                </a:solidFill>
-                <a:latin typeface="Courier"/>
-              </a:rPr>
-              <a:t>(paper_lm_model)[</a:t>
-            </a:r>
-            <a:r>
-              <a:rPr>
-                <a:solidFill>
-                  <a:srgbClr val="AD0000"/>
-                </a:solidFill>
-                <a:latin typeface="Courier"/>
-              </a:rPr>
-              <a:t>2</a:t>
-            </a:r>
-            <a:r>
-              <a:rPr>
-                <a:solidFill>
-                  <a:srgbClr val="003B4F"/>
-                </a:solidFill>
-                <a:latin typeface="Courier"/>
-              </a:rPr>
-              <a:t>,</a:t>
-            </a:r>
-            <a:r>
-              <a:rPr>
-                <a:solidFill>
-                  <a:srgbClr val="AD0000"/>
-                </a:solidFill>
-                <a:latin typeface="Courier"/>
-              </a:rPr>
-              <a:t>2</a:t>
-            </a:r>
-            <a:r>
-              <a:rPr>
-                <a:solidFill>
-                  <a:srgbClr val="003B4F"/>
-                </a:solidFill>
-                <a:latin typeface="Courier"/>
-              </a:rPr>
-              <a:t>], </a:t>
-            </a:r>
-            <a:r>
-              <a:rPr>
-                <a:solidFill>
-                  <a:srgbClr val="AD0000"/>
-                </a:solidFill>
-                <a:latin typeface="Courier"/>
-              </a:rPr>
-              <a:t>2</a:t>
-            </a:r>
-            <a:r>
-              <a:rPr>
-                <a:solidFill>
-                  <a:srgbClr val="003B4F"/>
-                </a:solidFill>
-                <a:latin typeface="Courier"/>
-              </a:rPr>
-              <a:t>), </a:t>
-            </a:r>
-            <a:r>
-              <a:rPr>
-                <a:solidFill>
-                  <a:srgbClr val="20794D"/>
-                </a:solidFill>
-                <a:latin typeface="Courier"/>
-              </a:rPr>
-              <a:t>"cm²/g)</a:t>
-            </a:r>
-            <a:r>
-              <a:rPr>
-                <a:solidFill>
-                  <a:srgbClr val="5E5E5E"/>
-                </a:solidFill>
-                <a:latin typeface="Courier"/>
-              </a:rPr>
-              <a:t>\n</a:t>
-            </a:r>
-            <a:r>
-              <a:rPr>
-                <a:solidFill>
-                  <a:srgbClr val="20794D"/>
-                </a:solidFill>
-                <a:latin typeface="Courier"/>
-              </a:rPr>
-              <a:t>"</a:t>
-            </a:r>
-            <a:r>
-              <a:rPr>
-                <a:solidFill>
-                  <a:srgbClr val="003B4F"/>
-                </a:solidFill>
-                <a:latin typeface="Courier"/>
-              </a:rPr>
-              <a:t>)</a:t>
-            </a:r>
-          </a:p>
-          <a:p>
-            <a:pPr lvl="0" indent="0">
-              <a:buNone/>
-            </a:pPr>
-            <a:r>
-              <a:rPr>
-                <a:latin typeface="Courier"/>
-              </a:rPr>
-              <a:t>(slope 95% CI:  130.23 to 130.82 cm²/g)</a:t>
+              <a:t>(slope 95% CI: 130.23 to 130.82 cm²/g)</a:t>
             </a:r>
           </a:p>
         </p:txBody>
@@ -13225,7 +13277,7 @@
             </a:r>
             <a:r>
               <a:rPr/>
-              <a:t> - F-statistic and both df (or t and df for slope test) - </a:t>
+              <a:t> - F-statistic and both df - </a:t>
             </a:r>
             <a:r>
               <a:rPr i="1"/>
@@ -13233,7 +13285,7 @@
             </a:r>
             <a:r>
               <a:rPr/>
-              <a:t>-value (never “p = 0.000” — write “p &lt; 0.001”) - R² - The actual equation with slope and intercept - 95% CI for the slope</a:t>
+              <a:t>-value (never “p = 0.000” — write “p &lt; 0.001”) - R² - The actual equation - 95% CI for the slope</a:t>
             </a:r>
           </a:p>
           <a:p>
@@ -13514,6 +13566,39 @@
                   <a:rPr>
                     <a:latin typeface="Courier"/>
                   </a:rPr>
+                  <a:t>mutate()</a:t>
+                </a:r>
+                <a:r>
+                  <a:rPr/>
+                  <a:t> with </a:t>
+                </a:r>
+                <a:r>
+                  <a:rPr>
+                    <a:latin typeface="Courier"/>
+                  </a:rPr>
+                  <a:t>fitted()</a:t>
+                </a:r>
+                <a:r>
+                  <a:rPr/>
+                  <a:t> and </a:t>
+                </a:r>
+                <a:r>
+                  <a:rPr>
+                    <a:latin typeface="Courier"/>
+                  </a:rPr>
+                  <a:t>residuals()</a:t>
+                </a:r>
+                <a:r>
+                  <a:rPr/>
+                  <a:t> — add model output to a data frame</a:t>
+                </a:r>
+              </a:p>
+              <a:p>
+                <a:pPr lvl="0"/>
+                <a:r>
+                  <a:rPr>
+                    <a:latin typeface="Courier"/>
+                  </a:rPr>
                   <a:t>predict(model, newdata, interval = "prediction")</a:t>
                 </a:r>
                 <a:r>
@@ -13853,6 +13938,23 @@
                 </a:r>
               </a:p>
               <a:p>
+                <a:pPr lvl="0"/>
+                <a:r>
+                  <a:rPr/>
+                  <a:t>Use </a:t>
+                </a:r>
+                <a:r>
+                  <a:rPr>
+                    <a:latin typeface="Courier"/>
+                  </a:rPr>
+                  <a:t>mutate()</a:t>
+                </a:r>
+                <a:r>
+                  <a:rPr/>
+                  <a:t> to add model results to a data frame</a:t>
+                </a:r>
+              </a:p>
+              <a:p>
                 <a:pPr lvl="0" indent="0" marL="1270000">
                   <a:buNone/>
                 </a:pPr>
@@ -14008,20 +14110,6 @@
                 <a:latin typeface="Courier"/>
               </a:rPr>
               <a:t>_model</a:t>
-            </a:r>
-            <a:r>
-              <a:rPr/>
-              <a:t> (e.g., </a:t>
-            </a:r>
-            <a:r>
-              <a:rPr>
-                <a:latin typeface="Courier"/>
-              </a:rPr>
-              <a:t>paper_lm_model</a:t>
-            </a:r>
-            <a:r>
-              <a:rPr/>
-              <a:t>)</a:t>
             </a:r>
           </a:p>
           <a:p>
@@ -16078,7 +16166,7 @@
             </a:pPr>
             <a:r>
               <a:rPr/>
-              <a:t>A significant slope with a low R² is possible (weak but real relationship). A high R² with a non-significant slope is not possible with large n.</a:t>
+              <a:t>A significant slope with a low R² is possible (weak but real relationship). In biology, R² values of 0.3–0.7 are common and meaningful.</a:t>
             </a:r>
           </a:p>
         </p:txBody>
@@ -16367,7 +16455,7 @@
                       </a:r>
                       <a:r>
                         <a:rPr/>
-                        <a:t> (homoscedasticity) — spread of residuals is constant across fitted values</a:t>
+                        <a:t> — spread of residuals is constant</a:t>
                       </a:r>
                     </a:p>
                   </a:txBody>

--- a/docs/lectures/lecture_05/05_lecture_powerpoint.pptx
+++ b/docs/lectures/lecture_05/05_lecture_powerpoint.pptx
@@ -3361,7 +3361,7 @@
             </a:pPr>
             <a:r>
               <a:rPr/>
-              <a:t>2026-06-28</a:t>
+              <a:t>2026-06-30</a:t>
             </a:r>
           </a:p>
         </p:txBody>
@@ -5379,7 +5379,6 @@
               <a:t>()</a:t>
             </a:r>
             <a:br/>
-            <a:br/>
             <a:r>
               <a:rPr>
                 <a:solidFill>
@@ -5566,7 +5565,7 @@
               <a:rPr>
                 <a:latin typeface="Courier"/>
               </a:rPr>
-              <a:t>lm()</a:t>
+              <a:t>lm() - Linear Model</a:t>
             </a:r>
           </a:p>
         </p:txBody>
@@ -5767,9 +5766,7 @@
             </a:r>
           </a:p>
           <a:p>
-            <a:pPr lvl="0" indent="0" marL="0">
-              <a:buNone/>
-            </a:pPr>
+            <a:pPr lvl="0"/>
             <a:r>
               <a:rPr>
                 <a:latin typeface="Courier"/>
@@ -5778,7 +5775,7 @@
             </a:r>
           </a:p>
           <a:p>
-            <a:pPr lvl="0"/>
+            <a:pPr lvl="1"/>
             <a:r>
               <a:rPr>
                 <a:latin typeface="Courier"/>
@@ -5805,7 +5802,7 @@
             </a:r>
           </a:p>
           <a:p>
-            <a:pPr lvl="0"/>
+            <a:pPr lvl="1"/>
             <a:r>
               <a:rPr>
                 <a:latin typeface="Courier"/>
@@ -5822,7 +5819,7 @@
             </a:r>
           </a:p>
           <a:p>
-            <a:pPr lvl="0"/>
+            <a:pPr lvl="1"/>
             <a:r>
               <a:rPr>
                 <a:latin typeface="Courier"/>
@@ -5835,9 +5832,7 @@
             </a:r>
           </a:p>
           <a:p>
-            <a:pPr lvl="0" indent="0" marL="0">
-              <a:buNone/>
-            </a:pPr>
+            <a:pPr lvl="0"/>
             <a:r>
               <a:rPr/>
               <a:t>So </a:t>
@@ -5854,9 +5849,7 @@
             </a:r>
           </a:p>
           <a:p>
-            <a:pPr lvl="0" indent="0" marL="0">
-              <a:buNone/>
-            </a:pPr>
+            <a:pPr lvl="0"/>
             <a:r>
               <a:rPr/>
               <a:t>The result is a </a:t>
@@ -5871,9 +5864,7 @@
             </a:r>
           </a:p>
           <a:p>
-            <a:pPr lvl="0" indent="0" marL="0">
-              <a:buNone/>
-            </a:pPr>
+            <a:pPr lvl="0"/>
             <a:r>
               <a:rPr/>
               <a:t>📖 W&amp;S §17.1 p. 543</a:t>
@@ -7371,45 +7362,35 @@
           <a:bodyPr/>
           <a:lstStyle/>
           <a:p>
-            <a:pPr lvl="0" indent="0" marL="0">
-              <a:buNone/>
-            </a:pPr>
+            <a:pPr lvl="0"/>
             <a:r>
               <a:rPr b="1"/>
               <a:t>What R² = 0.9999 means:</a:t>
             </a:r>
           </a:p>
           <a:p>
-            <a:pPr lvl="0" indent="0" marL="0">
-              <a:buNone/>
-            </a:pPr>
+            <a:pPr lvl="1"/>
             <a:r>
               <a:rPr/>
               <a:t>99.99% of the variation in paper area is explained by mass. The remaining 0.01% is measurement noise from the balance.</a:t>
             </a:r>
           </a:p>
           <a:p>
-            <a:pPr lvl="0" indent="0" marL="0">
-              <a:buNone/>
-            </a:pPr>
+            <a:pPr lvl="1"/>
             <a:r>
               <a:rPr/>
               <a:t>This is expected — the relationship between mass and area in uniform paper is essentially perfect.</a:t>
             </a:r>
           </a:p>
           <a:p>
-            <a:pPr lvl="0" indent="0" marL="0">
-              <a:buNone/>
-            </a:pPr>
+            <a:pPr lvl="1"/>
             <a:r>
               <a:rPr/>
               <a:t>In biological data, R² values of 0.3–0.7 are common and meaningful.</a:t>
             </a:r>
           </a:p>
           <a:p>
-            <a:pPr lvl="0" indent="0" marL="0">
-              <a:buNone/>
-            </a:pPr>
+            <a:pPr lvl="1"/>
             <a:r>
               <a:rPr/>
               <a:t>📖 W&amp;S §17.4 p. 555</a:t>
@@ -9267,9 +9248,7 @@
             </a:r>
           </a:p>
           <a:p>
-            <a:pPr lvl="0" indent="0" marL="0">
-              <a:buNone/>
-            </a:pPr>
+            <a:pPr lvl="0"/>
             <a:r>
               <a:rPr/>
               <a:t>✅ </a:t>
@@ -9284,9 +9263,7 @@
             </a:r>
           </a:p>
           <a:p>
-            <a:pPr lvl="0" indent="0" marL="0">
-              <a:buNone/>
-            </a:pPr>
+            <a:pPr lvl="0"/>
             <a:r>
               <a:rPr/>
               <a:t>❌ </a:t>
@@ -9301,9 +9278,7 @@
             </a:r>
           </a:p>
           <a:p>
-            <a:pPr lvl="0" indent="0" marL="0">
-              <a:buNone/>
-            </a:pPr>
+            <a:pPr lvl="0"/>
             <a:r>
               <a:rPr/>
               <a:t>📖 W&amp;S §17.5 p. 559 (Figure 17.5-4)</a:t>
@@ -14744,9 +14719,9 @@
                 <a:tableStyleId>{5C22544A-7EE6-4342-B048-85BDC9FD1C3A}</a:tableStyleId>
               </a:tblPr>
               <a:tblGrid>
-                <a:gridCol w="1473200"/>
-                <a:gridCol w="1473200"/>
-                <a:gridCol w="1473200"/>
+                <a:gridCol w="1066800"/>
+                <a:gridCol w="2565400"/>
+                <a:gridCol w="812800"/>
               </a:tblGrid>
               <a:tr h="0">
                 <a:tc>
@@ -15508,12 +15483,17 @@
                 </a14:m>
               </a:p>
               <a:p>
-                <a:pPr lvl="0" indent="0" marL="0">
-                  <a:buNone/>
-                </a:pPr>
+                <a:pPr lvl="0"/>
                 <a:r>
                   <a:rPr/>
-                  <a:t>Squaring serves two purposes: - Makes all deviations </a:t>
+                  <a:t>Squaring serves two purposes:</a:t>
+                </a:r>
+              </a:p>
+              <a:p>
+                <a:pPr lvl="1"/>
+                <a:r>
+                  <a:rPr/>
+                  <a:t>- Makes all deviations </a:t>
                 </a:r>
                 <a:r>
                   <a:rPr b="1"/>
@@ -15521,7 +15501,14 @@
                 </a:r>
                 <a:r>
                   <a:rPr/>
-                  <a:t> (no cancellation) - Penalizes </a:t>
+                  <a:t> (no cancellation)</a:t>
+                </a:r>
+              </a:p>
+              <a:p>
+                <a:pPr lvl="1"/>
+                <a:r>
+                  <a:rPr/>
+                  <a:t>- Penalizes </a:t>
                 </a:r>
                 <a:r>
                   <a:rPr b="1"/>
@@ -15533,18 +15520,14 @@
                 </a:r>
               </a:p>
               <a:p>
-                <a:pPr lvl="0" indent="0" marL="0">
-                  <a:buNone/>
-                </a:pPr>
+                <a:pPr lvl="0"/>
                 <a:r>
                   <a:rPr/>
                   <a:t>There is only one line that achieves this minimum — it is unique.</a:t>
                 </a:r>
               </a:p>
               <a:p>
-                <a:pPr lvl="0" indent="0" marL="0">
-                  <a:buNone/>
-                </a:pPr>
+                <a:pPr lvl="0"/>
                 <a:r>
                   <a:rPr/>
                   <a:t>📖 W&amp;S §17.1 p. 542 (Figure 17.1-2)</a:t>
@@ -15602,8 +15585,8 @@
               <a:rPr>
                 <a:latin typeface="Courier"/>
               </a:rPr>
-              <a:t>observed Y │ ●  ← residual (positive)
-           │    \
+              <a:t>observed Y │     ●  ← residual (positive)
+           │     |
 predicted Ŷ│-----●--- regression line
            │
            └──────────── X</a:t>
